--- a/AgenticAI/4-Agent-Architecture/Agent_Planner_Executor-TODO/Planner-Executor.pptx
+++ b/AgenticAI/4-Agent-Architecture/Agent_Planner_Executor-TODO/Planner-Executor.pptx
@@ -12,10 +12,10 @@
   </p:handoutMasterIdLst>
   <p:sldIdLst>
     <p:sldId id="257" r:id="rId2"/>
-    <p:sldId id="277" r:id="rId3"/>
-    <p:sldId id="278" r:id="rId4"/>
-    <p:sldId id="276" r:id="rId5"/>
-    <p:sldId id="279" r:id="rId6"/>
+    <p:sldId id="276" r:id="rId3"/>
+    <p:sldId id="279" r:id="rId4"/>
+    <p:sldId id="283" r:id="rId5"/>
+    <p:sldId id="278" r:id="rId6"/>
     <p:sldId id="280" r:id="rId7"/>
     <p:sldId id="281" r:id="rId8"/>
     <p:sldId id="275" r:id="rId9"/>
@@ -223,7 +223,7 @@
           <a:p>
             <a:fld id="{7BAEECA8-D063-486F-AE31-5020270C1449}" type="datetimeFigureOut">
               <a:rPr lang="en-US" smtClean="0"/>
-              <a:t>3/29/2026</a:t>
+              <a:t>5/2/2026</a:t>
             </a:fld>
             <a:endParaRPr lang="en-US"/>
           </a:p>
@@ -400,7 +400,7 @@
           <a:p>
             <a:fld id="{CB233BD1-3BA8-448D-9D08-7846095EA517}" type="datetimeFigureOut">
               <a:rPr lang="en-US" smtClean="0"/>
-              <a:t>3/29/2026</a:t>
+              <a:t>5/2/2026</a:t>
             </a:fld>
             <a:endParaRPr lang="en-US"/>
           </a:p>
@@ -814,7 +814,7 @@
           <a:p>
             <a:fld id="{6383FAE1-13DE-4511-8C1B-C8AFB720664C}" type="datetimeFigureOut">
               <a:rPr lang="en-US" smtClean="0"/>
-              <a:t>3/29/2026</a:t>
+              <a:t>5/2/2026</a:t>
             </a:fld>
             <a:endParaRPr lang="en-US"/>
           </a:p>
@@ -1012,7 +1012,7 @@
           <a:p>
             <a:fld id="{6383FAE1-13DE-4511-8C1B-C8AFB720664C}" type="datetimeFigureOut">
               <a:rPr lang="en-US" smtClean="0"/>
-              <a:t>3/29/2026</a:t>
+              <a:t>5/2/2026</a:t>
             </a:fld>
             <a:endParaRPr lang="en-US"/>
           </a:p>
@@ -1220,7 +1220,7 @@
           <a:p>
             <a:fld id="{6383FAE1-13DE-4511-8C1B-C8AFB720664C}" type="datetimeFigureOut">
               <a:rPr lang="en-US" smtClean="0"/>
-              <a:t>3/29/2026</a:t>
+              <a:t>5/2/2026</a:t>
             </a:fld>
             <a:endParaRPr lang="en-US"/>
           </a:p>
@@ -1418,7 +1418,7 @@
           <a:p>
             <a:fld id="{6383FAE1-13DE-4511-8C1B-C8AFB720664C}" type="datetimeFigureOut">
               <a:rPr lang="en-US" smtClean="0"/>
-              <a:t>3/29/2026</a:t>
+              <a:t>5/2/2026</a:t>
             </a:fld>
             <a:endParaRPr lang="en-US"/>
           </a:p>
@@ -1693,7 +1693,7 @@
           <a:p>
             <a:fld id="{6383FAE1-13DE-4511-8C1B-C8AFB720664C}" type="datetimeFigureOut">
               <a:rPr lang="en-US" smtClean="0"/>
-              <a:t>3/29/2026</a:t>
+              <a:t>5/2/2026</a:t>
             </a:fld>
             <a:endParaRPr lang="en-US"/>
           </a:p>
@@ -1958,7 +1958,7 @@
           <a:p>
             <a:fld id="{6383FAE1-13DE-4511-8C1B-C8AFB720664C}" type="datetimeFigureOut">
               <a:rPr lang="en-US" smtClean="0"/>
-              <a:t>3/29/2026</a:t>
+              <a:t>5/2/2026</a:t>
             </a:fld>
             <a:endParaRPr lang="en-US"/>
           </a:p>
@@ -2370,7 +2370,7 @@
           <a:p>
             <a:fld id="{6383FAE1-13DE-4511-8C1B-C8AFB720664C}" type="datetimeFigureOut">
               <a:rPr lang="en-US" smtClean="0"/>
-              <a:t>3/29/2026</a:t>
+              <a:t>5/2/2026</a:t>
             </a:fld>
             <a:endParaRPr lang="en-US"/>
           </a:p>
@@ -2511,7 +2511,7 @@
           <a:p>
             <a:fld id="{6383FAE1-13DE-4511-8C1B-C8AFB720664C}" type="datetimeFigureOut">
               <a:rPr lang="en-US" smtClean="0"/>
-              <a:t>3/29/2026</a:t>
+              <a:t>5/2/2026</a:t>
             </a:fld>
             <a:endParaRPr lang="en-US"/>
           </a:p>
@@ -2624,7 +2624,7 @@
           <a:p>
             <a:fld id="{6383FAE1-13DE-4511-8C1B-C8AFB720664C}" type="datetimeFigureOut">
               <a:rPr lang="en-US" smtClean="0"/>
-              <a:t>3/29/2026</a:t>
+              <a:t>5/2/2026</a:t>
             </a:fld>
             <a:endParaRPr lang="en-US"/>
           </a:p>
@@ -2935,7 +2935,7 @@
           <a:p>
             <a:fld id="{6383FAE1-13DE-4511-8C1B-C8AFB720664C}" type="datetimeFigureOut">
               <a:rPr lang="en-US" smtClean="0"/>
-              <a:t>3/29/2026</a:t>
+              <a:t>5/2/2026</a:t>
             </a:fld>
             <a:endParaRPr lang="en-US"/>
           </a:p>
@@ -3226,7 +3226,7 @@
           <a:p>
             <a:fld id="{6383FAE1-13DE-4511-8C1B-C8AFB720664C}" type="datetimeFigureOut">
               <a:rPr lang="en-US" smtClean="0"/>
-              <a:t>3/29/2026</a:t>
+              <a:t>5/2/2026</a:t>
             </a:fld>
             <a:endParaRPr lang="en-US"/>
           </a:p>
@@ -3470,7 +3470,7 @@
           <a:p>
             <a:fld id="{6383FAE1-13DE-4511-8C1B-C8AFB720664C}" type="datetimeFigureOut">
               <a:rPr lang="en-US" smtClean="0"/>
-              <a:t>3/29/2026</a:t>
+              <a:t>5/2/2026</a:t>
             </a:fld>
             <a:endParaRPr lang="en-US"/>
           </a:p>
@@ -4202,6 +4202,617 @@
           </a:p>
         </p:txBody>
       </p:sp>
+      <p:sp>
+        <p:nvSpPr>
+          <p:cNvPr id="2" name="TextBox 1">
+            <a:extLst>
+              <a:ext uri="{FF2B5EF4-FFF2-40B4-BE49-F238E27FC236}">
+                <a16:creationId xmlns:a16="http://schemas.microsoft.com/office/drawing/2014/main" id="{AD210492-2ADF-B249-C285-824CF82C394E}"/>
+              </a:ext>
+            </a:extLst>
+          </p:cNvPr>
+          <p:cNvSpPr txBox="1"/>
+          <p:nvPr/>
+        </p:nvSpPr>
+        <p:spPr>
+          <a:xfrm>
+            <a:off x="477520" y="3410295"/>
+            <a:ext cx="5263895" cy="2308324"/>
+          </a:xfrm>
+          <a:prstGeom prst="rect">
+            <a:avLst/>
+          </a:prstGeom>
+          <a:noFill/>
+        </p:spPr>
+        <p:txBody>
+          <a:bodyPr wrap="square">
+            <a:spAutoFit/>
+          </a:bodyPr>
+          <a:lstStyle/>
+          <a:p>
+            <a:r>
+              <a:rPr lang="en-US" sz="2400" b="1" dirty="0">
+                <a:solidFill>
+                  <a:schemeClr val="accent6">
+                    <a:lumMod val="60000"/>
+                    <a:lumOff val="40000"/>
+                  </a:schemeClr>
+                </a:solidFill>
+              </a:rPr>
+              <a:t>🔁 Core Flow</a:t>
+            </a:r>
+          </a:p>
+          <a:p>
+            <a:endParaRPr lang="en-US" sz="2400" b="1" dirty="0">
+              <a:solidFill>
+                <a:schemeClr val="accent6">
+                  <a:lumMod val="60000"/>
+                  <a:lumOff val="40000"/>
+                </a:schemeClr>
+              </a:solidFill>
+            </a:endParaRPr>
+          </a:p>
+          <a:p>
+            <a:pPr marL="457200" indent="-457200">
+              <a:buFont typeface="+mj-lt"/>
+              <a:buAutoNum type="arabicPeriod"/>
+            </a:pPr>
+            <a:r>
+              <a:rPr lang="en-US" sz="2400" dirty="0">
+                <a:solidFill>
+                  <a:schemeClr val="accent6">
+                    <a:lumMod val="60000"/>
+                    <a:lumOff val="40000"/>
+                  </a:schemeClr>
+                </a:solidFill>
+              </a:rPr>
+              <a:t>User gives a task </a:t>
+            </a:r>
+          </a:p>
+          <a:p>
+            <a:pPr marL="457200" indent="-457200">
+              <a:buFont typeface="+mj-lt"/>
+              <a:buAutoNum type="arabicPeriod"/>
+            </a:pPr>
+            <a:r>
+              <a:rPr lang="en-US" sz="2400" dirty="0">
+                <a:solidFill>
+                  <a:schemeClr val="accent6">
+                    <a:lumMod val="60000"/>
+                    <a:lumOff val="40000"/>
+                  </a:schemeClr>
+                </a:solidFill>
+              </a:rPr>
+              <a:t>Planner breaks it into steps </a:t>
+            </a:r>
+          </a:p>
+          <a:p>
+            <a:pPr marL="457200" indent="-457200">
+              <a:buFont typeface="+mj-lt"/>
+              <a:buAutoNum type="arabicPeriod"/>
+            </a:pPr>
+            <a:r>
+              <a:rPr lang="en-US" sz="2400" dirty="0">
+                <a:solidFill>
+                  <a:schemeClr val="accent6">
+                    <a:lumMod val="60000"/>
+                    <a:lumOff val="40000"/>
+                  </a:schemeClr>
+                </a:solidFill>
+              </a:rPr>
+              <a:t>Executor performs each step </a:t>
+            </a:r>
+          </a:p>
+          <a:p>
+            <a:pPr marL="457200" indent="-457200">
+              <a:buFont typeface="+mj-lt"/>
+              <a:buAutoNum type="arabicPeriod"/>
+            </a:pPr>
+            <a:r>
+              <a:rPr lang="en-US" sz="2400" dirty="0">
+                <a:solidFill>
+                  <a:schemeClr val="accent6">
+                    <a:lumMod val="60000"/>
+                    <a:lumOff val="40000"/>
+                  </a:schemeClr>
+                </a:solidFill>
+              </a:rPr>
+              <a:t>Results are combined and returned</a:t>
+            </a:r>
+          </a:p>
+        </p:txBody>
+      </p:sp>
+      <p:sp>
+        <p:nvSpPr>
+          <p:cNvPr id="3" name="Oval 2">
+            <a:extLst>
+              <a:ext uri="{FF2B5EF4-FFF2-40B4-BE49-F238E27FC236}">
+                <a16:creationId xmlns:a16="http://schemas.microsoft.com/office/drawing/2014/main" id="{A0E2B0F8-D604-D537-969C-A1D1DE4E24F3}"/>
+              </a:ext>
+            </a:extLst>
+          </p:cNvPr>
+          <p:cNvSpPr/>
+          <p:nvPr/>
+        </p:nvSpPr>
+        <p:spPr>
+          <a:xfrm>
+            <a:off x="7785103" y="2084832"/>
+            <a:ext cx="2633472" cy="1344168"/>
+          </a:xfrm>
+          <a:prstGeom prst="ellipse">
+            <a:avLst/>
+          </a:prstGeom>
+        </p:spPr>
+        <p:style>
+          <a:lnRef idx="2">
+            <a:schemeClr val="accent1">
+              <a:shade val="15000"/>
+            </a:schemeClr>
+          </a:lnRef>
+          <a:fillRef idx="1">
+            <a:schemeClr val="accent1"/>
+          </a:fillRef>
+          <a:effectRef idx="0">
+            <a:schemeClr val="accent1"/>
+          </a:effectRef>
+          <a:fontRef idx="minor">
+            <a:schemeClr val="lt1"/>
+          </a:fontRef>
+        </p:style>
+        <p:txBody>
+          <a:bodyPr rtlCol="0" anchor="ctr"/>
+          <a:lstStyle/>
+          <a:p>
+            <a:pPr algn="ctr"/>
+            <a:r>
+              <a:rPr lang="en-US" sz="2800" dirty="0"/>
+              <a:t>Main Task</a:t>
+            </a:r>
+          </a:p>
+        </p:txBody>
+      </p:sp>
+      <p:sp>
+        <p:nvSpPr>
+          <p:cNvPr id="4" name="Oval 3">
+            <a:extLst>
+              <a:ext uri="{FF2B5EF4-FFF2-40B4-BE49-F238E27FC236}">
+                <a16:creationId xmlns:a16="http://schemas.microsoft.com/office/drawing/2014/main" id="{3EAA2433-FF08-8D1D-4AD8-9A82F2D24C38}"/>
+              </a:ext>
+            </a:extLst>
+          </p:cNvPr>
+          <p:cNvSpPr/>
+          <p:nvPr/>
+        </p:nvSpPr>
+        <p:spPr>
+          <a:xfrm>
+            <a:off x="6450587" y="3896945"/>
+            <a:ext cx="1624584" cy="975360"/>
+          </a:xfrm>
+          <a:prstGeom prst="ellipse">
+            <a:avLst/>
+          </a:prstGeom>
+        </p:spPr>
+        <p:style>
+          <a:lnRef idx="2">
+            <a:schemeClr val="accent1">
+              <a:shade val="15000"/>
+            </a:schemeClr>
+          </a:lnRef>
+          <a:fillRef idx="1">
+            <a:schemeClr val="accent1"/>
+          </a:fillRef>
+          <a:effectRef idx="0">
+            <a:schemeClr val="accent1"/>
+          </a:effectRef>
+          <a:fontRef idx="minor">
+            <a:schemeClr val="lt1"/>
+          </a:fontRef>
+        </p:style>
+        <p:txBody>
+          <a:bodyPr rtlCol="0" anchor="ctr"/>
+          <a:lstStyle/>
+          <a:p>
+            <a:pPr algn="ctr"/>
+            <a:r>
+              <a:rPr lang="en-US" dirty="0"/>
+              <a:t>Sub-task1</a:t>
+            </a:r>
+          </a:p>
+        </p:txBody>
+      </p:sp>
+      <p:sp>
+        <p:nvSpPr>
+          <p:cNvPr id="5" name="Oval 4">
+            <a:extLst>
+              <a:ext uri="{FF2B5EF4-FFF2-40B4-BE49-F238E27FC236}">
+                <a16:creationId xmlns:a16="http://schemas.microsoft.com/office/drawing/2014/main" id="{C32DA08E-121D-58FF-4FBB-1E3A3F14E675}"/>
+              </a:ext>
+            </a:extLst>
+          </p:cNvPr>
+          <p:cNvSpPr/>
+          <p:nvPr/>
+        </p:nvSpPr>
+        <p:spPr>
+          <a:xfrm>
+            <a:off x="8262115" y="3896945"/>
+            <a:ext cx="1624584" cy="975360"/>
+          </a:xfrm>
+          <a:prstGeom prst="ellipse">
+            <a:avLst/>
+          </a:prstGeom>
+        </p:spPr>
+        <p:style>
+          <a:lnRef idx="2">
+            <a:schemeClr val="accent1">
+              <a:shade val="15000"/>
+            </a:schemeClr>
+          </a:lnRef>
+          <a:fillRef idx="1">
+            <a:schemeClr val="accent1"/>
+          </a:fillRef>
+          <a:effectRef idx="0">
+            <a:schemeClr val="accent1"/>
+          </a:effectRef>
+          <a:fontRef idx="minor">
+            <a:schemeClr val="lt1"/>
+          </a:fontRef>
+        </p:style>
+        <p:txBody>
+          <a:bodyPr rtlCol="0" anchor="ctr"/>
+          <a:lstStyle/>
+          <a:p>
+            <a:pPr algn="ctr"/>
+            <a:r>
+              <a:rPr lang="en-US" dirty="0"/>
+              <a:t>Sub-task2</a:t>
+            </a:r>
+          </a:p>
+        </p:txBody>
+      </p:sp>
+      <p:sp>
+        <p:nvSpPr>
+          <p:cNvPr id="6" name="Oval 5">
+            <a:extLst>
+              <a:ext uri="{FF2B5EF4-FFF2-40B4-BE49-F238E27FC236}">
+                <a16:creationId xmlns:a16="http://schemas.microsoft.com/office/drawing/2014/main" id="{1277467D-578D-C52D-345C-D54A0F682908}"/>
+              </a:ext>
+            </a:extLst>
+          </p:cNvPr>
+          <p:cNvSpPr/>
+          <p:nvPr/>
+        </p:nvSpPr>
+        <p:spPr>
+          <a:xfrm>
+            <a:off x="10059419" y="3896945"/>
+            <a:ext cx="1624584" cy="975360"/>
+          </a:xfrm>
+          <a:prstGeom prst="ellipse">
+            <a:avLst/>
+          </a:prstGeom>
+        </p:spPr>
+        <p:style>
+          <a:lnRef idx="2">
+            <a:schemeClr val="accent1">
+              <a:shade val="15000"/>
+            </a:schemeClr>
+          </a:lnRef>
+          <a:fillRef idx="1">
+            <a:schemeClr val="accent1"/>
+          </a:fillRef>
+          <a:effectRef idx="0">
+            <a:schemeClr val="accent1"/>
+          </a:effectRef>
+          <a:fontRef idx="minor">
+            <a:schemeClr val="lt1"/>
+          </a:fontRef>
+        </p:style>
+        <p:txBody>
+          <a:bodyPr rtlCol="0" anchor="ctr"/>
+          <a:lstStyle/>
+          <a:p>
+            <a:pPr algn="ctr"/>
+            <a:r>
+              <a:rPr lang="en-US" dirty="0"/>
+              <a:t>Sub-task3</a:t>
+            </a:r>
+          </a:p>
+        </p:txBody>
+      </p:sp>
+      <p:cxnSp>
+        <p:nvCxnSpPr>
+          <p:cNvPr id="8" name="Straight Arrow Connector 7">
+            <a:extLst>
+              <a:ext uri="{FF2B5EF4-FFF2-40B4-BE49-F238E27FC236}">
+                <a16:creationId xmlns:a16="http://schemas.microsoft.com/office/drawing/2014/main" id="{BB9060C5-D275-59F7-C55B-A1EB64184BA3}"/>
+              </a:ext>
+            </a:extLst>
+          </p:cNvPr>
+          <p:cNvCxnSpPr>
+            <a:cxnSpLocks/>
+          </p:cNvCxnSpPr>
+          <p:nvPr/>
+        </p:nvCxnSpPr>
+        <p:spPr>
+          <a:xfrm>
+            <a:off x="10336787" y="3202001"/>
+            <a:ext cx="420624" cy="530352"/>
+          </a:xfrm>
+          <a:prstGeom prst="straightConnector1">
+            <a:avLst/>
+          </a:prstGeom>
+          <a:ln w="76200">
+            <a:tailEnd type="triangle"/>
+          </a:ln>
+        </p:spPr>
+        <p:style>
+          <a:lnRef idx="3">
+            <a:schemeClr val="accent2"/>
+          </a:lnRef>
+          <a:fillRef idx="0">
+            <a:schemeClr val="accent2"/>
+          </a:fillRef>
+          <a:effectRef idx="2">
+            <a:schemeClr val="accent2"/>
+          </a:effectRef>
+          <a:fontRef idx="minor">
+            <a:schemeClr val="tx1"/>
+          </a:fontRef>
+        </p:style>
+      </p:cxnSp>
+      <p:cxnSp>
+        <p:nvCxnSpPr>
+          <p:cNvPr id="11" name="Straight Arrow Connector 10">
+            <a:extLst>
+              <a:ext uri="{FF2B5EF4-FFF2-40B4-BE49-F238E27FC236}">
+                <a16:creationId xmlns:a16="http://schemas.microsoft.com/office/drawing/2014/main" id="{57DBBD2A-7D4C-057B-0038-B41CB44ADF5A}"/>
+              </a:ext>
+            </a:extLst>
+          </p:cNvPr>
+          <p:cNvCxnSpPr>
+            <a:cxnSpLocks/>
+          </p:cNvCxnSpPr>
+          <p:nvPr/>
+        </p:nvCxnSpPr>
+        <p:spPr>
+          <a:xfrm>
+            <a:off x="9101839" y="3429000"/>
+            <a:ext cx="0" cy="462572"/>
+          </a:xfrm>
+          <a:prstGeom prst="straightConnector1">
+            <a:avLst/>
+          </a:prstGeom>
+          <a:ln w="76200">
+            <a:tailEnd type="triangle"/>
+          </a:ln>
+        </p:spPr>
+        <p:style>
+          <a:lnRef idx="3">
+            <a:schemeClr val="accent2"/>
+          </a:lnRef>
+          <a:fillRef idx="0">
+            <a:schemeClr val="accent2"/>
+          </a:fillRef>
+          <a:effectRef idx="2">
+            <a:schemeClr val="accent2"/>
+          </a:effectRef>
+          <a:fontRef idx="minor">
+            <a:schemeClr val="tx1"/>
+          </a:fontRef>
+        </p:style>
+      </p:cxnSp>
+      <p:cxnSp>
+        <p:nvCxnSpPr>
+          <p:cNvPr id="13" name="Straight Arrow Connector 12">
+            <a:extLst>
+              <a:ext uri="{FF2B5EF4-FFF2-40B4-BE49-F238E27FC236}">
+                <a16:creationId xmlns:a16="http://schemas.microsoft.com/office/drawing/2014/main" id="{2B92F025-B133-5A9F-6E9B-8ADF52878349}"/>
+              </a:ext>
+            </a:extLst>
+          </p:cNvPr>
+          <p:cNvCxnSpPr>
+            <a:cxnSpLocks/>
+          </p:cNvCxnSpPr>
+          <p:nvPr/>
+        </p:nvCxnSpPr>
+        <p:spPr>
+          <a:xfrm flipH="1">
+            <a:off x="7599047" y="3202001"/>
+            <a:ext cx="372111" cy="530352"/>
+          </a:xfrm>
+          <a:prstGeom prst="straightConnector1">
+            <a:avLst/>
+          </a:prstGeom>
+          <a:ln w="76200">
+            <a:tailEnd type="triangle"/>
+          </a:ln>
+        </p:spPr>
+        <p:style>
+          <a:lnRef idx="3">
+            <a:schemeClr val="accent2"/>
+          </a:lnRef>
+          <a:fillRef idx="0">
+            <a:schemeClr val="accent2"/>
+          </a:fillRef>
+          <a:effectRef idx="2">
+            <a:schemeClr val="accent2"/>
+          </a:effectRef>
+          <a:fontRef idx="minor">
+            <a:schemeClr val="tx1"/>
+          </a:fontRef>
+        </p:style>
+      </p:cxnSp>
+      <p:sp>
+        <p:nvSpPr>
+          <p:cNvPr id="15" name="Oval 14">
+            <a:extLst>
+              <a:ext uri="{FF2B5EF4-FFF2-40B4-BE49-F238E27FC236}">
+                <a16:creationId xmlns:a16="http://schemas.microsoft.com/office/drawing/2014/main" id="{A0626CF3-FEEF-6FF3-22C8-FAC287005D13}"/>
+              </a:ext>
+            </a:extLst>
+          </p:cNvPr>
+          <p:cNvSpPr/>
+          <p:nvPr/>
+        </p:nvSpPr>
+        <p:spPr>
+          <a:xfrm>
+            <a:off x="7938903" y="5718619"/>
+            <a:ext cx="2792095" cy="1120522"/>
+          </a:xfrm>
+          <a:prstGeom prst="ellipse">
+            <a:avLst/>
+          </a:prstGeom>
+        </p:spPr>
+        <p:style>
+          <a:lnRef idx="2">
+            <a:schemeClr val="accent1">
+              <a:shade val="15000"/>
+            </a:schemeClr>
+          </a:lnRef>
+          <a:fillRef idx="1">
+            <a:schemeClr val="accent1"/>
+          </a:fillRef>
+          <a:effectRef idx="0">
+            <a:schemeClr val="accent1"/>
+          </a:effectRef>
+          <a:fontRef idx="minor">
+            <a:schemeClr val="lt1"/>
+          </a:fontRef>
+        </p:style>
+        <p:txBody>
+          <a:bodyPr rtlCol="0" anchor="ctr"/>
+          <a:lstStyle/>
+          <a:p>
+            <a:pPr algn="ctr"/>
+            <a:r>
+              <a:rPr lang="en-US" sz="2800" dirty="0"/>
+              <a:t>Task Combined</a:t>
+            </a:r>
+          </a:p>
+        </p:txBody>
+      </p:sp>
+      <p:cxnSp>
+        <p:nvCxnSpPr>
+          <p:cNvPr id="16" name="Straight Arrow Connector 15">
+            <a:extLst>
+              <a:ext uri="{FF2B5EF4-FFF2-40B4-BE49-F238E27FC236}">
+                <a16:creationId xmlns:a16="http://schemas.microsoft.com/office/drawing/2014/main" id="{1B4BAB63-EB4A-4963-10C4-71E3C5664026}"/>
+              </a:ext>
+            </a:extLst>
+          </p:cNvPr>
+          <p:cNvCxnSpPr>
+            <a:cxnSpLocks/>
+          </p:cNvCxnSpPr>
+          <p:nvPr/>
+        </p:nvCxnSpPr>
+        <p:spPr>
+          <a:xfrm flipH="1">
+            <a:off x="10232519" y="5030286"/>
+            <a:ext cx="372111" cy="530352"/>
+          </a:xfrm>
+          <a:prstGeom prst="straightConnector1">
+            <a:avLst/>
+          </a:prstGeom>
+          <a:ln w="76200">
+            <a:tailEnd type="triangle"/>
+          </a:ln>
+        </p:spPr>
+        <p:style>
+          <a:lnRef idx="3">
+            <a:schemeClr val="accent2"/>
+          </a:lnRef>
+          <a:fillRef idx="0">
+            <a:schemeClr val="accent2"/>
+          </a:fillRef>
+          <a:effectRef idx="2">
+            <a:schemeClr val="accent2"/>
+          </a:effectRef>
+          <a:fontRef idx="minor">
+            <a:schemeClr val="tx1"/>
+          </a:fontRef>
+        </p:style>
+      </p:cxnSp>
+      <p:cxnSp>
+        <p:nvCxnSpPr>
+          <p:cNvPr id="17" name="Straight Arrow Connector 16">
+            <a:extLst>
+              <a:ext uri="{FF2B5EF4-FFF2-40B4-BE49-F238E27FC236}">
+                <a16:creationId xmlns:a16="http://schemas.microsoft.com/office/drawing/2014/main" id="{0EBF029A-F97D-FD2A-BACA-DBC417C88AAF}"/>
+              </a:ext>
+            </a:extLst>
+          </p:cNvPr>
+          <p:cNvCxnSpPr>
+            <a:cxnSpLocks/>
+          </p:cNvCxnSpPr>
+          <p:nvPr/>
+        </p:nvCxnSpPr>
+        <p:spPr>
+          <a:xfrm>
+            <a:off x="7728591" y="5106017"/>
+            <a:ext cx="420624" cy="530352"/>
+          </a:xfrm>
+          <a:prstGeom prst="straightConnector1">
+            <a:avLst/>
+          </a:prstGeom>
+          <a:ln w="76200">
+            <a:tailEnd type="triangle"/>
+          </a:ln>
+        </p:spPr>
+        <p:style>
+          <a:lnRef idx="3">
+            <a:schemeClr val="accent2"/>
+          </a:lnRef>
+          <a:fillRef idx="0">
+            <a:schemeClr val="accent2"/>
+          </a:fillRef>
+          <a:effectRef idx="2">
+            <a:schemeClr val="accent2"/>
+          </a:effectRef>
+          <a:fontRef idx="minor">
+            <a:schemeClr val="tx1"/>
+          </a:fontRef>
+        </p:style>
+      </p:cxnSp>
+      <p:cxnSp>
+        <p:nvCxnSpPr>
+          <p:cNvPr id="18" name="Straight Arrow Connector 17">
+            <a:extLst>
+              <a:ext uri="{FF2B5EF4-FFF2-40B4-BE49-F238E27FC236}">
+                <a16:creationId xmlns:a16="http://schemas.microsoft.com/office/drawing/2014/main" id="{5254CE34-0106-8EA4-FC30-8C2750836C91}"/>
+              </a:ext>
+            </a:extLst>
+          </p:cNvPr>
+          <p:cNvCxnSpPr>
+            <a:cxnSpLocks/>
+          </p:cNvCxnSpPr>
+          <p:nvPr/>
+        </p:nvCxnSpPr>
+        <p:spPr>
+          <a:xfrm>
+            <a:off x="9101839" y="5030286"/>
+            <a:ext cx="0" cy="462572"/>
+          </a:xfrm>
+          <a:prstGeom prst="straightConnector1">
+            <a:avLst/>
+          </a:prstGeom>
+          <a:ln w="76200">
+            <a:tailEnd type="triangle"/>
+          </a:ln>
+        </p:spPr>
+        <p:style>
+          <a:lnRef idx="3">
+            <a:schemeClr val="accent2"/>
+          </a:lnRef>
+          <a:fillRef idx="0">
+            <a:schemeClr val="accent2"/>
+          </a:fillRef>
+          <a:effectRef idx="2">
+            <a:schemeClr val="accent2"/>
+          </a:effectRef>
+          <a:fontRef idx="minor">
+            <a:schemeClr val="tx1"/>
+          </a:fontRef>
+        </p:style>
+      </p:cxnSp>
     </p:spTree>
     <p:extLst>
       <p:ext uri="{BB962C8B-B14F-4D97-AF65-F5344CB8AC3E}">
@@ -4223,7 +4834,7 @@
         <p:cNvPr id="1" name="">
           <a:extLst>
             <a:ext uri="{FF2B5EF4-FFF2-40B4-BE49-F238E27FC236}">
-              <a16:creationId xmlns:a16="http://schemas.microsoft.com/office/drawing/2014/main" id="{6F2922D2-54C5-C0F7-3310-8BB8BDF387F7}"/>
+              <a16:creationId xmlns:a16="http://schemas.microsoft.com/office/drawing/2014/main" id="{529EBDA7-B44E-B824-B04A-1C6D1FB40ED7}"/>
             </a:ext>
           </a:extLst>
         </p:cNvPr>
@@ -4240,10 +4851,10 @@
       </p:grpSpPr>
       <p:sp>
         <p:nvSpPr>
-          <p:cNvPr id="9" name="TextBox 8">
-            <a:extLst>
-              <a:ext uri="{FF2B5EF4-FFF2-40B4-BE49-F238E27FC236}">
-                <a16:creationId xmlns:a16="http://schemas.microsoft.com/office/drawing/2014/main" id="{AD210492-2ADF-B249-C285-824CF82C394E}"/>
+          <p:cNvPr id="3" name="TextBox 2">
+            <a:extLst>
+              <a:ext uri="{FF2B5EF4-FFF2-40B4-BE49-F238E27FC236}">
+                <a16:creationId xmlns:a16="http://schemas.microsoft.com/office/drawing/2014/main" id="{D2647263-0F49-19A9-2A00-5B6E7A771E5F}"/>
               </a:ext>
             </a:extLst>
           </p:cNvPr>
@@ -4252,8 +4863,8 @@
         </p:nvSpPr>
         <p:spPr>
           <a:xfrm>
-            <a:off x="477520" y="528288"/>
-            <a:ext cx="10292080" cy="2308324"/>
+            <a:off x="928116" y="379583"/>
+            <a:ext cx="8673084" cy="1569660"/>
           </a:xfrm>
           <a:prstGeom prst="rect">
             <a:avLst/>
@@ -4266,6 +4877,9 @@
           </a:bodyPr>
           <a:lstStyle/>
           <a:p>
+            <a:pPr>
+              <a:buNone/>
+            </a:pPr>
             <a:r>
               <a:rPr lang="en-US" sz="2400" b="1" dirty="0">
                 <a:solidFill>
@@ -4275,10 +4889,13 @@
                   </a:schemeClr>
                 </a:solidFill>
               </a:rPr>
-              <a:t>🔁 Core Flow</a:t>
-            </a:r>
-          </a:p>
-          <a:p>
+              <a:t>Example </a:t>
+            </a:r>
+          </a:p>
+          <a:p>
+            <a:pPr>
+              <a:buNone/>
+            </a:pPr>
             <a:endParaRPr lang="en-US" sz="2400" b="1" dirty="0">
               <a:solidFill>
                 <a:schemeClr val="accent6">
@@ -4289,12 +4906,11 @@
             </a:endParaRPr>
           </a:p>
           <a:p>
-            <a:pPr marL="457200" indent="-457200">
-              <a:buFont typeface="+mj-lt"/>
-              <a:buAutoNum type="arabicPeriod"/>
+            <a:pPr>
+              <a:buNone/>
             </a:pPr>
             <a:r>
-              <a:rPr lang="en-US" sz="2400" dirty="0">
+              <a:rPr lang="en-US" sz="2400" b="1" dirty="0">
                 <a:solidFill>
                   <a:schemeClr val="accent6">
                     <a:lumMod val="60000"/>
@@ -4302,13 +4918,12 @@
                   </a:schemeClr>
                 </a:solidFill>
               </a:rPr>
-              <a:t>User gives a task </a:t>
-            </a:r>
-          </a:p>
-          <a:p>
-            <a:pPr marL="457200" indent="-457200">
-              <a:buFont typeface="+mj-lt"/>
-              <a:buAutoNum type="arabicPeriod"/>
+              <a:t>Task:</a:t>
+            </a:r>
+          </a:p>
+          <a:p>
+            <a:pPr>
+              <a:buNone/>
             </a:pPr>
             <a:r>
               <a:rPr lang="en-US" sz="2400" dirty="0">
@@ -4319,41 +4934,7 @@
                   </a:schemeClr>
                 </a:solidFill>
               </a:rPr>
-              <a:t>Planner breaks it into steps </a:t>
-            </a:r>
-          </a:p>
-          <a:p>
-            <a:pPr marL="457200" indent="-457200">
-              <a:buFont typeface="+mj-lt"/>
-              <a:buAutoNum type="arabicPeriod"/>
-            </a:pPr>
-            <a:r>
-              <a:rPr lang="en-US" sz="2400" dirty="0">
-                <a:solidFill>
-                  <a:schemeClr val="accent6">
-                    <a:lumMod val="60000"/>
-                    <a:lumOff val="40000"/>
-                  </a:schemeClr>
-                </a:solidFill>
-              </a:rPr>
-              <a:t>Executor performs each step </a:t>
-            </a:r>
-          </a:p>
-          <a:p>
-            <a:pPr marL="457200" indent="-457200">
-              <a:buFont typeface="+mj-lt"/>
-              <a:buAutoNum type="arabicPeriod"/>
-            </a:pPr>
-            <a:r>
-              <a:rPr lang="en-US" sz="2400" dirty="0">
-                <a:solidFill>
-                  <a:schemeClr val="accent6">
-                    <a:lumMod val="60000"/>
-                    <a:lumOff val="40000"/>
-                  </a:schemeClr>
-                </a:solidFill>
-              </a:rPr>
-              <a:t>Results are combined and returned</a:t>
+              <a:t>"Summarize latest AI trends and create a blog post"</a:t>
             </a:r>
           </a:p>
         </p:txBody>
@@ -4361,7 +4942,7 @@
     </p:spTree>
     <p:extLst>
       <p:ext uri="{BB962C8B-B14F-4D97-AF65-F5344CB8AC3E}">
-        <p14:creationId xmlns:p14="http://schemas.microsoft.com/office/powerpoint/2010/main" val="3197713840"/>
+        <p14:creationId xmlns:p14="http://schemas.microsoft.com/office/powerpoint/2010/main" val="74278320"/>
       </p:ext>
     </p:extLst>
   </p:cSld>
@@ -4372,6 +4953,679 @@
 </file>
 
 <file path=ppt/slides/slide3.xml><?xml version="1.0" encoding="utf-8"?>
+<p:sld xmlns:a="http://schemas.openxmlformats.org/drawingml/2006/main" xmlns:r="http://schemas.openxmlformats.org/officeDocument/2006/relationships" xmlns:p="http://schemas.openxmlformats.org/presentationml/2006/main">
+  <p:cSld>
+    <p:spTree>
+      <p:nvGrpSpPr>
+        <p:cNvPr id="1" name="">
+          <a:extLst>
+            <a:ext uri="{FF2B5EF4-FFF2-40B4-BE49-F238E27FC236}">
+              <a16:creationId xmlns:a16="http://schemas.microsoft.com/office/drawing/2014/main" id="{D37559F3-AEA3-FE30-6521-65BF445F41E9}"/>
+            </a:ext>
+          </a:extLst>
+        </p:cNvPr>
+        <p:cNvGrpSpPr/>
+        <p:nvPr/>
+      </p:nvGrpSpPr>
+      <p:grpSpPr>
+        <a:xfrm>
+          <a:off x="0" y="0"/>
+          <a:ext cx="0" cy="0"/>
+          <a:chOff x="0" y="0"/>
+          <a:chExt cx="0" cy="0"/>
+        </a:xfrm>
+      </p:grpSpPr>
+      <p:sp>
+        <p:nvSpPr>
+          <p:cNvPr id="3" name="TextBox 2">
+            <a:extLst>
+              <a:ext uri="{FF2B5EF4-FFF2-40B4-BE49-F238E27FC236}">
+                <a16:creationId xmlns:a16="http://schemas.microsoft.com/office/drawing/2014/main" id="{7343377C-F2AF-9F9C-B3AB-3C0E2EA310AA}"/>
+              </a:ext>
+            </a:extLst>
+          </p:cNvPr>
+          <p:cNvSpPr txBox="1"/>
+          <p:nvPr/>
+        </p:nvSpPr>
+        <p:spPr>
+          <a:xfrm>
+            <a:off x="6853428" y="708767"/>
+            <a:ext cx="4201668" cy="1938992"/>
+          </a:xfrm>
+          <a:prstGeom prst="rect">
+            <a:avLst/>
+          </a:prstGeom>
+          <a:noFill/>
+        </p:spPr>
+        <p:txBody>
+          <a:bodyPr wrap="square">
+            <a:spAutoFit/>
+          </a:bodyPr>
+          <a:lstStyle/>
+          <a:p>
+            <a:r>
+              <a:rPr lang="en-US" sz="2400" b="1" dirty="0">
+                <a:solidFill>
+                  <a:schemeClr val="accent6">
+                    <a:lumMod val="60000"/>
+                    <a:lumOff val="40000"/>
+                  </a:schemeClr>
+                </a:solidFill>
+              </a:rPr>
+              <a:t>Planner Output:</a:t>
+            </a:r>
+          </a:p>
+          <a:p>
+            <a:r>
+              <a:rPr lang="en-US" sz="2400" dirty="0">
+                <a:solidFill>
+                  <a:schemeClr val="accent6">
+                    <a:lumMod val="60000"/>
+                    <a:lumOff val="40000"/>
+                  </a:schemeClr>
+                </a:solidFill>
+              </a:rPr>
+              <a:t>1. Search for latest AI trends</a:t>
+            </a:r>
+          </a:p>
+          <a:p>
+            <a:r>
+              <a:rPr lang="en-US" sz="2400" dirty="0">
+                <a:solidFill>
+                  <a:schemeClr val="accent6">
+                    <a:lumMod val="60000"/>
+                    <a:lumOff val="40000"/>
+                  </a:schemeClr>
+                </a:solidFill>
+              </a:rPr>
+              <a:t>2. Extract key points</a:t>
+            </a:r>
+          </a:p>
+          <a:p>
+            <a:r>
+              <a:rPr lang="en-US" sz="2400" dirty="0">
+                <a:solidFill>
+                  <a:schemeClr val="accent6">
+                    <a:lumMod val="60000"/>
+                    <a:lumOff val="40000"/>
+                  </a:schemeClr>
+                </a:solidFill>
+              </a:rPr>
+              <a:t>3. Structure blog outline</a:t>
+            </a:r>
+          </a:p>
+          <a:p>
+            <a:r>
+              <a:rPr lang="en-US" sz="2400" dirty="0">
+                <a:solidFill>
+                  <a:schemeClr val="accent6">
+                    <a:lumMod val="60000"/>
+                    <a:lumOff val="40000"/>
+                  </a:schemeClr>
+                </a:solidFill>
+              </a:rPr>
+              <a:t>4. Write blog content</a:t>
+            </a:r>
+          </a:p>
+        </p:txBody>
+      </p:sp>
+      <p:sp>
+        <p:nvSpPr>
+          <p:cNvPr id="4" name="TextBox 3">
+            <a:extLst>
+              <a:ext uri="{FF2B5EF4-FFF2-40B4-BE49-F238E27FC236}">
+                <a16:creationId xmlns:a16="http://schemas.microsoft.com/office/drawing/2014/main" id="{A4CB8C31-7D42-D46A-9956-C9E30419CE77}"/>
+              </a:ext>
+            </a:extLst>
+          </p:cNvPr>
+          <p:cNvSpPr txBox="1"/>
+          <p:nvPr/>
+        </p:nvSpPr>
+        <p:spPr>
+          <a:xfrm>
+            <a:off x="7072884" y="3220688"/>
+            <a:ext cx="4091940" cy="1938992"/>
+          </a:xfrm>
+          <a:prstGeom prst="rect">
+            <a:avLst/>
+          </a:prstGeom>
+          <a:noFill/>
+        </p:spPr>
+        <p:txBody>
+          <a:bodyPr wrap="square">
+            <a:spAutoFit/>
+          </a:bodyPr>
+          <a:lstStyle/>
+          <a:p>
+            <a:pPr>
+              <a:buNone/>
+            </a:pPr>
+            <a:r>
+              <a:rPr lang="en-US" sz="2400" b="1" dirty="0">
+                <a:solidFill>
+                  <a:schemeClr val="accent6">
+                    <a:lumMod val="60000"/>
+                    <a:lumOff val="40000"/>
+                  </a:schemeClr>
+                </a:solidFill>
+              </a:rPr>
+              <a:t>Executor Actions:</a:t>
+            </a:r>
+          </a:p>
+          <a:p>
+            <a:pPr marL="342900" indent="-342900">
+              <a:buFont typeface="Arial" panose="020B0604020202020204" pitchFamily="34" charset="0"/>
+              <a:buChar char="•"/>
+            </a:pPr>
+            <a:r>
+              <a:rPr lang="en-US" sz="2400" dirty="0">
+                <a:solidFill>
+                  <a:schemeClr val="accent6">
+                    <a:lumMod val="60000"/>
+                    <a:lumOff val="40000"/>
+                  </a:schemeClr>
+                </a:solidFill>
+              </a:rPr>
+              <a:t>Step 1 → calls search API </a:t>
+            </a:r>
+          </a:p>
+          <a:p>
+            <a:pPr marL="342900" indent="-342900">
+              <a:buFont typeface="Arial" panose="020B0604020202020204" pitchFamily="34" charset="0"/>
+              <a:buChar char="•"/>
+            </a:pPr>
+            <a:r>
+              <a:rPr lang="en-US" sz="2400" dirty="0">
+                <a:solidFill>
+                  <a:schemeClr val="accent6">
+                    <a:lumMod val="60000"/>
+                    <a:lumOff val="40000"/>
+                  </a:schemeClr>
+                </a:solidFill>
+              </a:rPr>
+              <a:t>Step 2 → processes text </a:t>
+            </a:r>
+          </a:p>
+          <a:p>
+            <a:pPr marL="342900" indent="-342900">
+              <a:buFont typeface="Arial" panose="020B0604020202020204" pitchFamily="34" charset="0"/>
+              <a:buChar char="•"/>
+            </a:pPr>
+            <a:r>
+              <a:rPr lang="en-US" sz="2400" dirty="0">
+                <a:solidFill>
+                  <a:schemeClr val="accent6">
+                    <a:lumMod val="60000"/>
+                    <a:lumOff val="40000"/>
+                  </a:schemeClr>
+                </a:solidFill>
+              </a:rPr>
+              <a:t>Step 3 → creates outline </a:t>
+            </a:r>
+          </a:p>
+          <a:p>
+            <a:pPr marL="342900" indent="-342900">
+              <a:buFont typeface="Arial" panose="020B0604020202020204" pitchFamily="34" charset="0"/>
+              <a:buChar char="•"/>
+            </a:pPr>
+            <a:r>
+              <a:rPr lang="en-US" sz="2400" dirty="0">
+                <a:solidFill>
+                  <a:schemeClr val="accent6">
+                    <a:lumMod val="60000"/>
+                    <a:lumOff val="40000"/>
+                  </a:schemeClr>
+                </a:solidFill>
+              </a:rPr>
+              <a:t>Step 4 → generates blog</a:t>
+            </a:r>
+          </a:p>
+        </p:txBody>
+      </p:sp>
+      <p:pic>
+        <p:nvPicPr>
+          <p:cNvPr id="6" name="Picture 5">
+            <a:extLst>
+              <a:ext uri="{FF2B5EF4-FFF2-40B4-BE49-F238E27FC236}">
+                <a16:creationId xmlns:a16="http://schemas.microsoft.com/office/drawing/2014/main" id="{129DEBAD-4D25-1A91-CCA2-4FEB4A3F24E4}"/>
+              </a:ext>
+            </a:extLst>
+          </p:cNvPr>
+          <p:cNvPicPr>
+            <a:picLocks noChangeAspect="1"/>
+          </p:cNvPicPr>
+          <p:nvPr/>
+        </p:nvPicPr>
+        <p:blipFill>
+          <a:blip r:embed="rId2"/>
+          <a:stretch>
+            <a:fillRect/>
+          </a:stretch>
+        </p:blipFill>
+        <p:spPr>
+          <a:xfrm>
+            <a:off x="231648" y="151217"/>
+            <a:ext cx="6621780" cy="6138942"/>
+          </a:xfrm>
+          <a:prstGeom prst="rect">
+            <a:avLst/>
+          </a:prstGeom>
+        </p:spPr>
+      </p:pic>
+    </p:spTree>
+    <p:extLst>
+      <p:ext uri="{BB962C8B-B14F-4D97-AF65-F5344CB8AC3E}">
+        <p14:creationId xmlns:p14="http://schemas.microsoft.com/office/powerpoint/2010/main" val="3181544007"/>
+      </p:ext>
+    </p:extLst>
+  </p:cSld>
+  <p:clrMapOvr>
+    <a:masterClrMapping/>
+  </p:clrMapOvr>
+</p:sld>
+</file>
+
+<file path=ppt/slides/slide4.xml><?xml version="1.0" encoding="utf-8"?>
+<p:sld xmlns:a="http://schemas.openxmlformats.org/drawingml/2006/main" xmlns:r="http://schemas.openxmlformats.org/officeDocument/2006/relationships" xmlns:p="http://schemas.openxmlformats.org/presentationml/2006/main">
+  <p:cSld>
+    <p:spTree>
+      <p:nvGrpSpPr>
+        <p:cNvPr id="1" name="">
+          <a:extLst>
+            <a:ext uri="{FF2B5EF4-FFF2-40B4-BE49-F238E27FC236}">
+              <a16:creationId xmlns:a16="http://schemas.microsoft.com/office/drawing/2014/main" id="{B1897451-02EB-DDD3-3088-C33AF54464F7}"/>
+            </a:ext>
+          </a:extLst>
+        </p:cNvPr>
+        <p:cNvGrpSpPr/>
+        <p:nvPr/>
+      </p:nvGrpSpPr>
+      <p:grpSpPr>
+        <a:xfrm>
+          <a:off x="0" y="0"/>
+          <a:ext cx="0" cy="0"/>
+          <a:chOff x="0" y="0"/>
+          <a:chExt cx="0" cy="0"/>
+        </a:xfrm>
+      </p:grpSpPr>
+      <p:sp>
+        <p:nvSpPr>
+          <p:cNvPr id="3" name="TextBox 2">
+            <a:extLst>
+              <a:ext uri="{FF2B5EF4-FFF2-40B4-BE49-F238E27FC236}">
+                <a16:creationId xmlns:a16="http://schemas.microsoft.com/office/drawing/2014/main" id="{E32A0A02-9691-9DD8-1628-42922E1B43BB}"/>
+              </a:ext>
+            </a:extLst>
+          </p:cNvPr>
+          <p:cNvSpPr txBox="1"/>
+          <p:nvPr/>
+        </p:nvSpPr>
+        <p:spPr>
+          <a:xfrm>
+            <a:off x="333756" y="132695"/>
+            <a:ext cx="8673084" cy="5632311"/>
+          </a:xfrm>
+          <a:prstGeom prst="rect">
+            <a:avLst/>
+          </a:prstGeom>
+          <a:noFill/>
+        </p:spPr>
+        <p:txBody>
+          <a:bodyPr wrap="square">
+            <a:spAutoFit/>
+          </a:bodyPr>
+          <a:lstStyle/>
+          <a:p>
+            <a:r>
+              <a:rPr lang="en-US" sz="2400" b="1" dirty="0">
+                <a:solidFill>
+                  <a:schemeClr val="accent6">
+                    <a:lumMod val="60000"/>
+                    <a:lumOff val="40000"/>
+                  </a:schemeClr>
+                </a:solidFill>
+              </a:rPr>
+              <a:t>Example Scenario: Customer Support System</a:t>
+            </a:r>
+          </a:p>
+          <a:p>
+            <a:endParaRPr lang="en-US" sz="2400" dirty="0">
+              <a:solidFill>
+                <a:schemeClr val="accent6">
+                  <a:lumMod val="60000"/>
+                  <a:lumOff val="40000"/>
+                </a:schemeClr>
+              </a:solidFill>
+            </a:endParaRPr>
+          </a:p>
+          <a:p>
+            <a:r>
+              <a:rPr lang="en-US" sz="2400" b="1" dirty="0">
+                <a:solidFill>
+                  <a:schemeClr val="accent6">
+                    <a:lumMod val="60000"/>
+                    <a:lumOff val="40000"/>
+                  </a:schemeClr>
+                </a:solidFill>
+              </a:rPr>
+              <a:t>Goal:</a:t>
+            </a:r>
+            <a:r>
+              <a:rPr lang="en-US" sz="2400" dirty="0">
+                <a:solidFill>
+                  <a:schemeClr val="accent6">
+                    <a:lumMod val="60000"/>
+                    <a:lumOff val="40000"/>
+                  </a:schemeClr>
+                </a:solidFill>
+              </a:rPr>
+              <a:t> "Cancel order 123 and refund the customer.“</a:t>
+            </a:r>
+          </a:p>
+          <a:p>
+            <a:endParaRPr lang="en-US" sz="2400" dirty="0">
+              <a:solidFill>
+                <a:schemeClr val="accent6">
+                  <a:lumMod val="60000"/>
+                  <a:lumOff val="40000"/>
+                </a:schemeClr>
+              </a:solidFill>
+            </a:endParaRPr>
+          </a:p>
+          <a:p>
+            <a:r>
+              <a:rPr lang="en-US" sz="2400" b="1" dirty="0">
+                <a:solidFill>
+                  <a:schemeClr val="accent6">
+                    <a:lumMod val="60000"/>
+                    <a:lumOff val="40000"/>
+                  </a:schemeClr>
+                </a:solidFill>
+              </a:rPr>
+              <a:t>Planner:</a:t>
+            </a:r>
+            <a:r>
+              <a:rPr lang="en-US" sz="2400" dirty="0">
+                <a:solidFill>
+                  <a:schemeClr val="accent6">
+                    <a:lumMod val="60000"/>
+                    <a:lumOff val="40000"/>
+                  </a:schemeClr>
+                </a:solidFill>
+              </a:rPr>
+              <a:t> Breaks the task into: </a:t>
+            </a:r>
+          </a:p>
+          <a:p>
+            <a:pPr marL="457200" indent="-457200">
+              <a:buAutoNum type="arabicParenBoth"/>
+            </a:pPr>
+            <a:r>
+              <a:rPr lang="en-US" sz="2400" dirty="0">
+                <a:solidFill>
+                  <a:schemeClr val="accent6">
+                    <a:lumMod val="60000"/>
+                    <a:lumOff val="40000"/>
+                  </a:schemeClr>
+                </a:solidFill>
+              </a:rPr>
+              <a:t>Find order 123 in the system. </a:t>
+            </a:r>
+          </a:p>
+          <a:p>
+            <a:pPr marL="457200" indent="-457200">
+              <a:buAutoNum type="arabicParenBoth"/>
+            </a:pPr>
+            <a:r>
+              <a:rPr lang="en-US" sz="2400" dirty="0">
+                <a:solidFill>
+                  <a:schemeClr val="accent6">
+                    <a:lumMod val="60000"/>
+                    <a:lumOff val="40000"/>
+                  </a:schemeClr>
+                </a:solidFill>
+              </a:rPr>
+              <a:t>Check if eligible for refund. </a:t>
+            </a:r>
+          </a:p>
+          <a:p>
+            <a:pPr marL="457200" indent="-457200">
+              <a:buAutoNum type="arabicParenBoth"/>
+            </a:pPr>
+            <a:r>
+              <a:rPr lang="en-US" sz="2400" dirty="0">
+                <a:solidFill>
+                  <a:schemeClr val="accent6">
+                    <a:lumMod val="60000"/>
+                    <a:lumOff val="40000"/>
+                  </a:schemeClr>
+                </a:solidFill>
+              </a:rPr>
+              <a:t>Process refund.</a:t>
+            </a:r>
+          </a:p>
+          <a:p>
+            <a:pPr marL="457200" indent="-457200">
+              <a:buAutoNum type="arabicParenBoth"/>
+            </a:pPr>
+            <a:r>
+              <a:rPr lang="en-US" sz="2400" dirty="0">
+                <a:solidFill>
+                  <a:schemeClr val="accent6">
+                    <a:lumMod val="60000"/>
+                    <a:lumOff val="40000"/>
+                  </a:schemeClr>
+                </a:solidFill>
+              </a:rPr>
+              <a:t> Send confirmation email.</a:t>
+            </a:r>
+          </a:p>
+          <a:p>
+            <a:pPr marL="457200" indent="-457200">
+              <a:buAutoNum type="arabicParenBoth"/>
+            </a:pPr>
+            <a:endParaRPr lang="en-US" sz="2400" dirty="0">
+              <a:solidFill>
+                <a:schemeClr val="accent6">
+                  <a:lumMod val="60000"/>
+                  <a:lumOff val="40000"/>
+                </a:schemeClr>
+              </a:solidFill>
+            </a:endParaRPr>
+          </a:p>
+          <a:p>
+            <a:r>
+              <a:rPr lang="en-US" sz="2400" b="1" dirty="0">
+                <a:solidFill>
+                  <a:schemeClr val="accent6">
+                    <a:lumMod val="60000"/>
+                    <a:lumOff val="40000"/>
+                  </a:schemeClr>
+                </a:solidFill>
+              </a:rPr>
+              <a:t>Executor:</a:t>
+            </a:r>
+            <a:r>
+              <a:rPr lang="en-US" sz="2400" dirty="0">
+                <a:solidFill>
+                  <a:schemeClr val="accent6">
+                    <a:lumMod val="60000"/>
+                    <a:lumOff val="40000"/>
+                  </a:schemeClr>
+                </a:solidFill>
+              </a:rPr>
+              <a:t> </a:t>
+            </a:r>
+          </a:p>
+          <a:p>
+            <a:pPr marL="457200" indent="-457200">
+              <a:buFont typeface="+mj-lt"/>
+              <a:buAutoNum type="arabicPeriod"/>
+            </a:pPr>
+            <a:r>
+              <a:rPr lang="en-US" sz="2400" dirty="0">
+                <a:solidFill>
+                  <a:schemeClr val="accent6">
+                    <a:lumMod val="60000"/>
+                    <a:lumOff val="40000"/>
+                  </a:schemeClr>
+                </a:solidFill>
+              </a:rPr>
+              <a:t>Executes step 1 using a </a:t>
+            </a:r>
+            <a:r>
+              <a:rPr lang="en-US" sz="2400" dirty="0" err="1">
+                <a:solidFill>
+                  <a:schemeClr val="accent6">
+                    <a:lumMod val="60000"/>
+                    <a:lumOff val="40000"/>
+                  </a:schemeClr>
+                </a:solidFill>
+              </a:rPr>
+              <a:t>DatabaseTool</a:t>
+            </a:r>
+            <a:r>
+              <a:rPr lang="en-US" sz="2400" dirty="0">
+                <a:solidFill>
+                  <a:schemeClr val="accent6">
+                    <a:lumMod val="60000"/>
+                    <a:lumOff val="40000"/>
+                  </a:schemeClr>
+                </a:solidFill>
+              </a:rPr>
+              <a:t>, </a:t>
+            </a:r>
+          </a:p>
+          <a:p>
+            <a:pPr marL="457200" indent="-457200">
+              <a:buFont typeface="+mj-lt"/>
+              <a:buAutoNum type="arabicPeriod"/>
+            </a:pPr>
+            <a:r>
+              <a:rPr lang="en-US" sz="2400" dirty="0">
+                <a:solidFill>
+                  <a:schemeClr val="accent6">
+                    <a:lumMod val="60000"/>
+                    <a:lumOff val="40000"/>
+                  </a:schemeClr>
+                </a:solidFill>
+              </a:rPr>
+              <a:t>Execute step 2 with </a:t>
+            </a:r>
+            <a:r>
+              <a:rPr lang="en-US" sz="2400" dirty="0" err="1">
+                <a:solidFill>
+                  <a:schemeClr val="accent6">
+                    <a:lumMod val="60000"/>
+                    <a:lumOff val="40000"/>
+                  </a:schemeClr>
+                </a:solidFill>
+              </a:rPr>
+              <a:t>PolicyTool</a:t>
+            </a:r>
+            <a:r>
+              <a:rPr lang="en-US" sz="2400" dirty="0">
+                <a:solidFill>
+                  <a:schemeClr val="accent6">
+                    <a:lumMod val="60000"/>
+                    <a:lumOff val="40000"/>
+                  </a:schemeClr>
+                </a:solidFill>
+              </a:rPr>
+              <a:t>, </a:t>
+            </a:r>
+          </a:p>
+          <a:p>
+            <a:pPr marL="457200" indent="-457200">
+              <a:buFont typeface="+mj-lt"/>
+              <a:buAutoNum type="arabicPeriod"/>
+            </a:pPr>
+            <a:r>
+              <a:rPr lang="en-US" sz="2400" dirty="0">
+                <a:solidFill>
+                  <a:schemeClr val="accent6">
+                    <a:lumMod val="60000"/>
+                    <a:lumOff val="40000"/>
+                  </a:schemeClr>
+                </a:solidFill>
+              </a:rPr>
+              <a:t>Execute step 3 with </a:t>
+            </a:r>
+            <a:r>
+              <a:rPr lang="en-US" sz="2400" dirty="0" err="1">
+                <a:solidFill>
+                  <a:schemeClr val="accent6">
+                    <a:lumMod val="60000"/>
+                    <a:lumOff val="40000"/>
+                  </a:schemeClr>
+                </a:solidFill>
+              </a:rPr>
+              <a:t>PaymentTool</a:t>
+            </a:r>
+            <a:r>
+              <a:rPr lang="en-US" sz="2400" dirty="0">
+                <a:solidFill>
+                  <a:schemeClr val="accent6">
+                    <a:lumMod val="60000"/>
+                    <a:lumOff val="40000"/>
+                  </a:schemeClr>
+                </a:solidFill>
+              </a:rPr>
+              <a:t>, and </a:t>
+            </a:r>
+          </a:p>
+          <a:p>
+            <a:pPr marL="457200" indent="-457200">
+              <a:buFont typeface="+mj-lt"/>
+              <a:buAutoNum type="arabicPeriod"/>
+            </a:pPr>
+            <a:r>
+              <a:rPr lang="en-US" sz="2400" dirty="0">
+                <a:solidFill>
+                  <a:schemeClr val="accent6">
+                    <a:lumMod val="60000"/>
+                    <a:lumOff val="40000"/>
+                  </a:schemeClr>
+                </a:solidFill>
+              </a:rPr>
+              <a:t>Execute step 4 with </a:t>
+            </a:r>
+            <a:r>
+              <a:rPr lang="en-US" sz="2400" dirty="0" err="1">
+                <a:solidFill>
+                  <a:schemeClr val="accent6">
+                    <a:lumMod val="60000"/>
+                    <a:lumOff val="40000"/>
+                  </a:schemeClr>
+                </a:solidFill>
+              </a:rPr>
+              <a:t>EmailTool</a:t>
+            </a:r>
+            <a:endParaRPr lang="en-US" sz="2400" dirty="0">
+              <a:solidFill>
+                <a:schemeClr val="accent6">
+                  <a:lumMod val="60000"/>
+                  <a:lumOff val="40000"/>
+                </a:schemeClr>
+              </a:solidFill>
+            </a:endParaRPr>
+          </a:p>
+        </p:txBody>
+      </p:sp>
+    </p:spTree>
+    <p:extLst>
+      <p:ext uri="{BB962C8B-B14F-4D97-AF65-F5344CB8AC3E}">
+        <p14:creationId xmlns:p14="http://schemas.microsoft.com/office/powerpoint/2010/main" val="993078881"/>
+      </p:ext>
+    </p:extLst>
+  </p:cSld>
+  <p:clrMapOvr>
+    <a:masterClrMapping/>
+  </p:clrMapOvr>
+</p:sld>
+</file>
+
+<file path=ppt/slides/slide5.xml><?xml version="1.0" encoding="utf-8"?>
 <p:sld xmlns:a="http://schemas.openxmlformats.org/drawingml/2006/main" xmlns:r="http://schemas.openxmlformats.org/officeDocument/2006/relationships" xmlns:p="http://schemas.openxmlformats.org/presentationml/2006/main">
   <p:cSld>
     <p:spTree>
@@ -5161,405 +6415,6 @@
     <p:extLst>
       <p:ext uri="{BB962C8B-B14F-4D97-AF65-F5344CB8AC3E}">
         <p14:creationId xmlns:p14="http://schemas.microsoft.com/office/powerpoint/2010/main" val="3691489925"/>
-      </p:ext>
-    </p:extLst>
-  </p:cSld>
-  <p:clrMapOvr>
-    <a:masterClrMapping/>
-  </p:clrMapOvr>
-</p:sld>
-</file>
-
-<file path=ppt/slides/slide4.xml><?xml version="1.0" encoding="utf-8"?>
-<p:sld xmlns:a="http://schemas.openxmlformats.org/drawingml/2006/main" xmlns:r="http://schemas.openxmlformats.org/officeDocument/2006/relationships" xmlns:p="http://schemas.openxmlformats.org/presentationml/2006/main">
-  <p:cSld>
-    <p:spTree>
-      <p:nvGrpSpPr>
-        <p:cNvPr id="1" name="">
-          <a:extLst>
-            <a:ext uri="{FF2B5EF4-FFF2-40B4-BE49-F238E27FC236}">
-              <a16:creationId xmlns:a16="http://schemas.microsoft.com/office/drawing/2014/main" id="{529EBDA7-B44E-B824-B04A-1C6D1FB40ED7}"/>
-            </a:ext>
-          </a:extLst>
-        </p:cNvPr>
-        <p:cNvGrpSpPr/>
-        <p:nvPr/>
-      </p:nvGrpSpPr>
-      <p:grpSpPr>
-        <a:xfrm>
-          <a:off x="0" y="0"/>
-          <a:ext cx="0" cy="0"/>
-          <a:chOff x="0" y="0"/>
-          <a:chExt cx="0" cy="0"/>
-        </a:xfrm>
-      </p:grpSpPr>
-      <p:sp>
-        <p:nvSpPr>
-          <p:cNvPr id="3" name="TextBox 2">
-            <a:extLst>
-              <a:ext uri="{FF2B5EF4-FFF2-40B4-BE49-F238E27FC236}">
-                <a16:creationId xmlns:a16="http://schemas.microsoft.com/office/drawing/2014/main" id="{D2647263-0F49-19A9-2A00-5B6E7A771E5F}"/>
-              </a:ext>
-            </a:extLst>
-          </p:cNvPr>
-          <p:cNvSpPr txBox="1"/>
-          <p:nvPr/>
-        </p:nvSpPr>
-        <p:spPr>
-          <a:xfrm>
-            <a:off x="1037844" y="708767"/>
-            <a:ext cx="8673084" cy="1569660"/>
-          </a:xfrm>
-          <a:prstGeom prst="rect">
-            <a:avLst/>
-          </a:prstGeom>
-          <a:noFill/>
-        </p:spPr>
-        <p:txBody>
-          <a:bodyPr wrap="square">
-            <a:spAutoFit/>
-          </a:bodyPr>
-          <a:lstStyle/>
-          <a:p>
-            <a:pPr>
-              <a:buNone/>
-            </a:pPr>
-            <a:r>
-              <a:rPr lang="en-US" sz="2400" b="1" dirty="0">
-                <a:solidFill>
-                  <a:schemeClr val="accent6">
-                    <a:lumMod val="60000"/>
-                    <a:lumOff val="40000"/>
-                  </a:schemeClr>
-                </a:solidFill>
-              </a:rPr>
-              <a:t>Example </a:t>
-            </a:r>
-          </a:p>
-          <a:p>
-            <a:pPr>
-              <a:buNone/>
-            </a:pPr>
-            <a:endParaRPr lang="en-US" sz="2400" b="1" dirty="0">
-              <a:solidFill>
-                <a:schemeClr val="accent6">
-                  <a:lumMod val="60000"/>
-                  <a:lumOff val="40000"/>
-                </a:schemeClr>
-              </a:solidFill>
-            </a:endParaRPr>
-          </a:p>
-          <a:p>
-            <a:pPr>
-              <a:buNone/>
-            </a:pPr>
-            <a:r>
-              <a:rPr lang="en-US" sz="2400" b="1" dirty="0">
-                <a:solidFill>
-                  <a:schemeClr val="accent6">
-                    <a:lumMod val="60000"/>
-                    <a:lumOff val="40000"/>
-                  </a:schemeClr>
-                </a:solidFill>
-              </a:rPr>
-              <a:t>Task:</a:t>
-            </a:r>
-          </a:p>
-          <a:p>
-            <a:pPr>
-              <a:buNone/>
-            </a:pPr>
-            <a:r>
-              <a:rPr lang="en-US" sz="2400" dirty="0">
-                <a:solidFill>
-                  <a:schemeClr val="accent6">
-                    <a:lumMod val="60000"/>
-                    <a:lumOff val="40000"/>
-                  </a:schemeClr>
-                </a:solidFill>
-              </a:rPr>
-              <a:t>"Summarize latest AI trends and create a blog post"</a:t>
-            </a:r>
-          </a:p>
-        </p:txBody>
-      </p:sp>
-    </p:spTree>
-    <p:extLst>
-      <p:ext uri="{BB962C8B-B14F-4D97-AF65-F5344CB8AC3E}">
-        <p14:creationId xmlns:p14="http://schemas.microsoft.com/office/powerpoint/2010/main" val="74278320"/>
-      </p:ext>
-    </p:extLst>
-  </p:cSld>
-  <p:clrMapOvr>
-    <a:masterClrMapping/>
-  </p:clrMapOvr>
-</p:sld>
-</file>
-
-<file path=ppt/slides/slide5.xml><?xml version="1.0" encoding="utf-8"?>
-<p:sld xmlns:a="http://schemas.openxmlformats.org/drawingml/2006/main" xmlns:r="http://schemas.openxmlformats.org/officeDocument/2006/relationships" xmlns:p="http://schemas.openxmlformats.org/presentationml/2006/main">
-  <p:cSld>
-    <p:spTree>
-      <p:nvGrpSpPr>
-        <p:cNvPr id="1" name="">
-          <a:extLst>
-            <a:ext uri="{FF2B5EF4-FFF2-40B4-BE49-F238E27FC236}">
-              <a16:creationId xmlns:a16="http://schemas.microsoft.com/office/drawing/2014/main" id="{D37559F3-AEA3-FE30-6521-65BF445F41E9}"/>
-            </a:ext>
-          </a:extLst>
-        </p:cNvPr>
-        <p:cNvGrpSpPr/>
-        <p:nvPr/>
-      </p:nvGrpSpPr>
-      <p:grpSpPr>
-        <a:xfrm>
-          <a:off x="0" y="0"/>
-          <a:ext cx="0" cy="0"/>
-          <a:chOff x="0" y="0"/>
-          <a:chExt cx="0" cy="0"/>
-        </a:xfrm>
-      </p:grpSpPr>
-      <p:sp>
-        <p:nvSpPr>
-          <p:cNvPr id="3" name="TextBox 2">
-            <a:extLst>
-              <a:ext uri="{FF2B5EF4-FFF2-40B4-BE49-F238E27FC236}">
-                <a16:creationId xmlns:a16="http://schemas.microsoft.com/office/drawing/2014/main" id="{7343377C-F2AF-9F9C-B3AB-3C0E2EA310AA}"/>
-              </a:ext>
-            </a:extLst>
-          </p:cNvPr>
-          <p:cNvSpPr txBox="1"/>
-          <p:nvPr/>
-        </p:nvSpPr>
-        <p:spPr>
-          <a:xfrm>
-            <a:off x="6853428" y="708767"/>
-            <a:ext cx="4201668" cy="1938992"/>
-          </a:xfrm>
-          <a:prstGeom prst="rect">
-            <a:avLst/>
-          </a:prstGeom>
-          <a:noFill/>
-        </p:spPr>
-        <p:txBody>
-          <a:bodyPr wrap="square">
-            <a:spAutoFit/>
-          </a:bodyPr>
-          <a:lstStyle/>
-          <a:p>
-            <a:r>
-              <a:rPr lang="en-US" sz="2400" b="1" dirty="0">
-                <a:solidFill>
-                  <a:schemeClr val="accent6">
-                    <a:lumMod val="60000"/>
-                    <a:lumOff val="40000"/>
-                  </a:schemeClr>
-                </a:solidFill>
-              </a:rPr>
-              <a:t>Planner Output:</a:t>
-            </a:r>
-          </a:p>
-          <a:p>
-            <a:r>
-              <a:rPr lang="en-US" sz="2400" dirty="0">
-                <a:solidFill>
-                  <a:schemeClr val="accent6">
-                    <a:lumMod val="60000"/>
-                    <a:lumOff val="40000"/>
-                  </a:schemeClr>
-                </a:solidFill>
-              </a:rPr>
-              <a:t>1. Search for latest AI trends</a:t>
-            </a:r>
-          </a:p>
-          <a:p>
-            <a:r>
-              <a:rPr lang="en-US" sz="2400" dirty="0">
-                <a:solidFill>
-                  <a:schemeClr val="accent6">
-                    <a:lumMod val="60000"/>
-                    <a:lumOff val="40000"/>
-                  </a:schemeClr>
-                </a:solidFill>
-              </a:rPr>
-              <a:t>2. Extract key points</a:t>
-            </a:r>
-          </a:p>
-          <a:p>
-            <a:r>
-              <a:rPr lang="en-US" sz="2400" dirty="0">
-                <a:solidFill>
-                  <a:schemeClr val="accent6">
-                    <a:lumMod val="60000"/>
-                    <a:lumOff val="40000"/>
-                  </a:schemeClr>
-                </a:solidFill>
-              </a:rPr>
-              <a:t>3. Structure blog outline</a:t>
-            </a:r>
-          </a:p>
-          <a:p>
-            <a:r>
-              <a:rPr lang="en-US" sz="2400" dirty="0">
-                <a:solidFill>
-                  <a:schemeClr val="accent6">
-                    <a:lumMod val="60000"/>
-                    <a:lumOff val="40000"/>
-                  </a:schemeClr>
-                </a:solidFill>
-              </a:rPr>
-              <a:t>4. Write blog content</a:t>
-            </a:r>
-          </a:p>
-        </p:txBody>
-      </p:sp>
-      <p:sp>
-        <p:nvSpPr>
-          <p:cNvPr id="4" name="TextBox 3">
-            <a:extLst>
-              <a:ext uri="{FF2B5EF4-FFF2-40B4-BE49-F238E27FC236}">
-                <a16:creationId xmlns:a16="http://schemas.microsoft.com/office/drawing/2014/main" id="{A4CB8C31-7D42-D46A-9956-C9E30419CE77}"/>
-              </a:ext>
-            </a:extLst>
-          </p:cNvPr>
-          <p:cNvSpPr txBox="1"/>
-          <p:nvPr/>
-        </p:nvSpPr>
-        <p:spPr>
-          <a:xfrm>
-            <a:off x="7072884" y="3220688"/>
-            <a:ext cx="4091940" cy="1938992"/>
-          </a:xfrm>
-          <a:prstGeom prst="rect">
-            <a:avLst/>
-          </a:prstGeom>
-          <a:noFill/>
-        </p:spPr>
-        <p:txBody>
-          <a:bodyPr wrap="square">
-            <a:spAutoFit/>
-          </a:bodyPr>
-          <a:lstStyle/>
-          <a:p>
-            <a:pPr>
-              <a:buNone/>
-            </a:pPr>
-            <a:r>
-              <a:rPr lang="en-US" sz="2400" b="1" dirty="0">
-                <a:solidFill>
-                  <a:schemeClr val="accent6">
-                    <a:lumMod val="60000"/>
-                    <a:lumOff val="40000"/>
-                  </a:schemeClr>
-                </a:solidFill>
-              </a:rPr>
-              <a:t>Executor Actions:</a:t>
-            </a:r>
-          </a:p>
-          <a:p>
-            <a:pPr marL="342900" indent="-342900">
-              <a:buFont typeface="Arial" panose="020B0604020202020204" pitchFamily="34" charset="0"/>
-              <a:buChar char="•"/>
-            </a:pPr>
-            <a:r>
-              <a:rPr lang="en-US" sz="2400" dirty="0">
-                <a:solidFill>
-                  <a:schemeClr val="accent6">
-                    <a:lumMod val="60000"/>
-                    <a:lumOff val="40000"/>
-                  </a:schemeClr>
-                </a:solidFill>
-              </a:rPr>
-              <a:t>Step 1 → calls search API </a:t>
-            </a:r>
-          </a:p>
-          <a:p>
-            <a:pPr marL="342900" indent="-342900">
-              <a:buFont typeface="Arial" panose="020B0604020202020204" pitchFamily="34" charset="0"/>
-              <a:buChar char="•"/>
-            </a:pPr>
-            <a:r>
-              <a:rPr lang="en-US" sz="2400" dirty="0">
-                <a:solidFill>
-                  <a:schemeClr val="accent6">
-                    <a:lumMod val="60000"/>
-                    <a:lumOff val="40000"/>
-                  </a:schemeClr>
-                </a:solidFill>
-              </a:rPr>
-              <a:t>Step 2 → processes text </a:t>
-            </a:r>
-          </a:p>
-          <a:p>
-            <a:pPr marL="342900" indent="-342900">
-              <a:buFont typeface="Arial" panose="020B0604020202020204" pitchFamily="34" charset="0"/>
-              <a:buChar char="•"/>
-            </a:pPr>
-            <a:r>
-              <a:rPr lang="en-US" sz="2400" dirty="0">
-                <a:solidFill>
-                  <a:schemeClr val="accent6">
-                    <a:lumMod val="60000"/>
-                    <a:lumOff val="40000"/>
-                  </a:schemeClr>
-                </a:solidFill>
-              </a:rPr>
-              <a:t>Step 3 → creates outline </a:t>
-            </a:r>
-          </a:p>
-          <a:p>
-            <a:pPr marL="342900" indent="-342900">
-              <a:buFont typeface="Arial" panose="020B0604020202020204" pitchFamily="34" charset="0"/>
-              <a:buChar char="•"/>
-            </a:pPr>
-            <a:r>
-              <a:rPr lang="en-US" sz="2400" dirty="0">
-                <a:solidFill>
-                  <a:schemeClr val="accent6">
-                    <a:lumMod val="60000"/>
-                    <a:lumOff val="40000"/>
-                  </a:schemeClr>
-                </a:solidFill>
-              </a:rPr>
-              <a:t>Step 4 → generates blog</a:t>
-            </a:r>
-          </a:p>
-        </p:txBody>
-      </p:sp>
-      <p:pic>
-        <p:nvPicPr>
-          <p:cNvPr id="6" name="Picture 5">
-            <a:extLst>
-              <a:ext uri="{FF2B5EF4-FFF2-40B4-BE49-F238E27FC236}">
-                <a16:creationId xmlns:a16="http://schemas.microsoft.com/office/drawing/2014/main" id="{129DEBAD-4D25-1A91-CCA2-4FEB4A3F24E4}"/>
-              </a:ext>
-            </a:extLst>
-          </p:cNvPr>
-          <p:cNvPicPr>
-            <a:picLocks noChangeAspect="1"/>
-          </p:cNvPicPr>
-          <p:nvPr/>
-        </p:nvPicPr>
-        <p:blipFill>
-          <a:blip r:embed="rId2"/>
-          <a:stretch>
-            <a:fillRect/>
-          </a:stretch>
-        </p:blipFill>
-        <p:spPr>
-          <a:xfrm>
-            <a:off x="231648" y="151217"/>
-            <a:ext cx="6621780" cy="6138942"/>
-          </a:xfrm>
-          <a:prstGeom prst="rect">
-            <a:avLst/>
-          </a:prstGeom>
-        </p:spPr>
-      </p:pic>
-    </p:spTree>
-    <p:extLst>
-      <p:ext uri="{BB962C8B-B14F-4D97-AF65-F5344CB8AC3E}">
-        <p14:creationId xmlns:p14="http://schemas.microsoft.com/office/powerpoint/2010/main" val="3181544007"/>
       </p:ext>
     </p:extLst>
   </p:cSld>
